--- a/prezentacie/c03w.pptx
+++ b/prezentacie/c03w.pptx
@@ -252,7 +252,7 @@
           <a:p>
             <a:fld id="{10052495-8BC8-4CFB-94B1-B0429F101A0D}" type="datetimeFigureOut">
               <a:rPr lang="sk-SK" smtClean="0"/>
-              <a:t>14. 9. 2025</a:t>
+              <a:t>23. 9. 2026</a:t>
             </a:fld>
             <a:endParaRPr lang="sk-SK"/>
           </a:p>
@@ -422,7 +422,7 @@
           <a:p>
             <a:fld id="{10052495-8BC8-4CFB-94B1-B0429F101A0D}" type="datetimeFigureOut">
               <a:rPr lang="sk-SK" smtClean="0"/>
-              <a:t>14. 9. 2025</a:t>
+              <a:t>23. 9. 2026</a:t>
             </a:fld>
             <a:endParaRPr lang="sk-SK"/>
           </a:p>
@@ -602,7 +602,7 @@
           <a:p>
             <a:fld id="{10052495-8BC8-4CFB-94B1-B0429F101A0D}" type="datetimeFigureOut">
               <a:rPr lang="sk-SK" smtClean="0"/>
-              <a:t>14. 9. 2025</a:t>
+              <a:t>23. 9. 2026</a:t>
             </a:fld>
             <a:endParaRPr lang="sk-SK"/>
           </a:p>
@@ -772,7 +772,7 @@
           <a:p>
             <a:fld id="{10052495-8BC8-4CFB-94B1-B0429F101A0D}" type="datetimeFigureOut">
               <a:rPr lang="sk-SK" smtClean="0"/>
-              <a:t>14. 9. 2025</a:t>
+              <a:t>23. 9. 2026</a:t>
             </a:fld>
             <a:endParaRPr lang="sk-SK"/>
           </a:p>
@@ -1018,7 +1018,7 @@
           <a:p>
             <a:fld id="{10052495-8BC8-4CFB-94B1-B0429F101A0D}" type="datetimeFigureOut">
               <a:rPr lang="sk-SK" smtClean="0"/>
-              <a:t>14. 9. 2025</a:t>
+              <a:t>23. 9. 2026</a:t>
             </a:fld>
             <a:endParaRPr lang="sk-SK"/>
           </a:p>
@@ -1250,7 +1250,7 @@
           <a:p>
             <a:fld id="{10052495-8BC8-4CFB-94B1-B0429F101A0D}" type="datetimeFigureOut">
               <a:rPr lang="sk-SK" smtClean="0"/>
-              <a:t>14. 9. 2025</a:t>
+              <a:t>23. 9. 2026</a:t>
             </a:fld>
             <a:endParaRPr lang="sk-SK"/>
           </a:p>
@@ -1617,7 +1617,7 @@
           <a:p>
             <a:fld id="{10052495-8BC8-4CFB-94B1-B0429F101A0D}" type="datetimeFigureOut">
               <a:rPr lang="sk-SK" smtClean="0"/>
-              <a:t>14. 9. 2025</a:t>
+              <a:t>23. 9. 2026</a:t>
             </a:fld>
             <a:endParaRPr lang="sk-SK"/>
           </a:p>
@@ -1735,7 +1735,7 @@
           <a:p>
             <a:fld id="{10052495-8BC8-4CFB-94B1-B0429F101A0D}" type="datetimeFigureOut">
               <a:rPr lang="sk-SK" smtClean="0"/>
-              <a:t>14. 9. 2025</a:t>
+              <a:t>23. 9. 2026</a:t>
             </a:fld>
             <a:endParaRPr lang="sk-SK"/>
           </a:p>
@@ -1830,7 +1830,7 @@
           <a:p>
             <a:fld id="{10052495-8BC8-4CFB-94B1-B0429F101A0D}" type="datetimeFigureOut">
               <a:rPr lang="sk-SK" smtClean="0"/>
-              <a:t>14. 9. 2025</a:t>
+              <a:t>23. 9. 2026</a:t>
             </a:fld>
             <a:endParaRPr lang="sk-SK"/>
           </a:p>
@@ -2107,7 +2107,7 @@
           <a:p>
             <a:fld id="{10052495-8BC8-4CFB-94B1-B0429F101A0D}" type="datetimeFigureOut">
               <a:rPr lang="sk-SK" smtClean="0"/>
-              <a:t>14. 9. 2025</a:t>
+              <a:t>23. 9. 2026</a:t>
             </a:fld>
             <a:endParaRPr lang="sk-SK"/>
           </a:p>
@@ -2364,7 +2364,7 @@
           <a:p>
             <a:fld id="{10052495-8BC8-4CFB-94B1-B0429F101A0D}" type="datetimeFigureOut">
               <a:rPr lang="sk-SK" smtClean="0"/>
-              <a:t>14. 9. 2025</a:t>
+              <a:t>23. 9. 2026</a:t>
             </a:fld>
             <a:endParaRPr lang="sk-SK"/>
           </a:p>
@@ -2577,7 +2577,7 @@
           <a:p>
             <a:fld id="{10052495-8BC8-4CFB-94B1-B0429F101A0D}" type="datetimeFigureOut">
               <a:rPr lang="sk-SK" smtClean="0"/>
-              <a:t>14. 9. 2025</a:t>
+              <a:t>23. 9. 2026</a:t>
             </a:fld>
             <a:endParaRPr lang="sk-SK"/>
           </a:p>
@@ -3504,7 +3504,15 @@
             </a:br>
             <a:r>
               <a:rPr lang="sk-SK" b="1" dirty="0"/>
-              <a:t>Ing. Jozef Wagner PhD.</a:t>
+              <a:t>Ing. Jozef Wagner</a:t>
+            </a:r>
+            <a:r>
+              <a:rPr lang="en-US" b="1" dirty="0"/>
+              <a:t>,</a:t>
+            </a:r>
+            <a:r>
+              <a:rPr lang="sk-SK" b="1" dirty="0"/>
+              <a:t> PhD.</a:t>
             </a:r>
           </a:p>
           <a:p>
@@ -3622,15 +3630,36 @@
               <a:buNone/>
             </a:pPr>
             <a:r>
-              <a:rPr lang="sk-SK" dirty="0" err="1"/>
+              <a:rPr lang="sk-SK" dirty="0" err="1">
+                <a:solidFill>
+                  <a:srgbClr val="FF0000"/>
+                </a:solidFill>
+                <a:highlight>
+                  <a:srgbClr val="00FFFF"/>
+                </a:highlight>
+              </a:rPr>
               <a:t>I</a:t>
             </a:r>
             <a:r>
-              <a:rPr lang="sk-SK" sz="2800" dirty="0" err="1"/>
+              <a:rPr lang="sk-SK" sz="2800" dirty="0" err="1">
+                <a:solidFill>
+                  <a:srgbClr val="FF0000"/>
+                </a:solidFill>
+                <a:highlight>
+                  <a:srgbClr val="00FFFF"/>
+                </a:highlight>
+              </a:rPr>
               <a:t>teruje</a:t>
             </a:r>
             <a:r>
-              <a:rPr lang="sk-SK" sz="2800" dirty="0"/>
+              <a:rPr lang="sk-SK" sz="2800" dirty="0">
+                <a:solidFill>
+                  <a:srgbClr val="FF0000"/>
+                </a:solidFill>
+                <a:highlight>
+                  <a:srgbClr val="00FFFF"/>
+                </a:highlight>
+              </a:rPr>
               <a:t> naprieč kolekciou</a:t>
             </a:r>
           </a:p>
@@ -3642,11 +3671,25 @@
               <a:buNone/>
             </a:pPr>
             <a:r>
-              <a:rPr lang="sk-SK" dirty="0"/>
+              <a:rPr lang="sk-SK" dirty="0">
+                <a:solidFill>
+                  <a:srgbClr val="FF0000"/>
+                </a:solidFill>
+                <a:highlight>
+                  <a:srgbClr val="00FFFF"/>
+                </a:highlight>
+              </a:rPr>
               <a:t>P</a:t>
             </a:r>
             <a:r>
-              <a:rPr lang="sk-SK" sz="2800" dirty="0"/>
+              <a:rPr lang="sk-SK" sz="2800" dirty="0">
+                <a:solidFill>
+                  <a:srgbClr val="FF0000"/>
+                </a:solidFill>
+                <a:highlight>
+                  <a:srgbClr val="00FFFF"/>
+                </a:highlight>
+              </a:rPr>
               <a:t>oužíva sa na čítanie, nie na modifikáciu</a:t>
             </a:r>
           </a:p>
@@ -3658,11 +3701,25 @@
               <a:buNone/>
             </a:pPr>
             <a:r>
-              <a:rPr lang="sk-SK" dirty="0"/>
+              <a:rPr lang="sk-SK" dirty="0">
+                <a:solidFill>
+                  <a:srgbClr val="FF0000"/>
+                </a:solidFill>
+                <a:highlight>
+                  <a:srgbClr val="00FFFF"/>
+                </a:highlight>
+              </a:rPr>
               <a:t>N</a:t>
             </a:r>
             <a:r>
-              <a:rPr lang="sk-SK" sz="2800" dirty="0"/>
+              <a:rPr lang="sk-SK" sz="2800" dirty="0">
+                <a:solidFill>
+                  <a:srgbClr val="FF0000"/>
+                </a:solidFill>
+                <a:highlight>
+                  <a:srgbClr val="00FFFF"/>
+                </a:highlight>
+              </a:rPr>
               <a:t>eposkytuje pozíciu prvku v cykle, nemá index</a:t>
             </a:r>
           </a:p>
@@ -3689,6 +3746,9 @@
             </a:pPr>
             <a:r>
               <a:rPr lang="sk-SK" sz="2800" dirty="0" err="1">
+                <a:solidFill>
+                  <a:srgbClr val="FF0000"/>
+                </a:solidFill>
                 <a:highlight>
                   <a:srgbClr val="FFFF00"/>
                 </a:highlight>
@@ -3698,6 +3758,9 @@
             </a:r>
             <a:r>
               <a:rPr lang="sk-SK" sz="2800" dirty="0">
+                <a:solidFill>
+                  <a:srgbClr val="FF0000"/>
+                </a:solidFill>
                 <a:highlight>
                   <a:srgbClr val="FFFF00"/>
                 </a:highlight>
@@ -3707,6 +3770,9 @@
             </a:r>
             <a:r>
               <a:rPr lang="sk-SK" sz="2800" dirty="0" err="1">
+                <a:solidFill>
+                  <a:srgbClr val="FF0000"/>
+                </a:solidFill>
                 <a:highlight>
                   <a:srgbClr val="FFFF00"/>
                 </a:highlight>
@@ -3716,6 +3782,9 @@
             </a:r>
             <a:r>
               <a:rPr lang="sk-SK" sz="2800" dirty="0">
+                <a:solidFill>
+                  <a:srgbClr val="FF0000"/>
+                </a:solidFill>
                 <a:highlight>
                   <a:srgbClr val="FFFF00"/>
                 </a:highlight>
@@ -3732,6 +3801,9 @@
               <a:buNone/>
             </a:pPr>
             <a:endParaRPr lang="sk-SK" sz="2800" dirty="0">
+              <a:solidFill>
+                <a:srgbClr val="FF0000"/>
+              </a:solidFill>
               <a:highlight>
                 <a:srgbClr val="FFFF00"/>
               </a:highlight>
@@ -3747,6 +3819,9 @@
             </a:pPr>
             <a:r>
               <a:rPr lang="sk-SK" sz="2800" dirty="0" err="1">
+                <a:solidFill>
+                  <a:srgbClr val="FF0000"/>
+                </a:solidFill>
                 <a:highlight>
                   <a:srgbClr val="FFFF00"/>
                 </a:highlight>
@@ -3756,6 +3831,9 @@
             </a:r>
             <a:r>
               <a:rPr lang="sk-SK" sz="2800" dirty="0">
+                <a:solidFill>
+                  <a:srgbClr val="FF0000"/>
+                </a:solidFill>
                 <a:highlight>
                   <a:srgbClr val="FFFF00"/>
                 </a:highlight>
@@ -3765,6 +3843,9 @@
             </a:r>
             <a:r>
               <a:rPr lang="sk-SK" sz="2800" dirty="0" err="1">
+                <a:solidFill>
+                  <a:srgbClr val="FF0000"/>
+                </a:solidFill>
                 <a:highlight>
                   <a:srgbClr val="FFFF00"/>
                 </a:highlight>
@@ -3774,6 +3855,9 @@
             </a:r>
             <a:r>
               <a:rPr lang="sk-SK" sz="2800" dirty="0">
+                <a:solidFill>
+                  <a:srgbClr val="FF0000"/>
+                </a:solidFill>
                 <a:highlight>
                   <a:srgbClr val="FFFF00"/>
                 </a:highlight>
@@ -3783,6 +3867,9 @@
             </a:r>
             <a:r>
               <a:rPr lang="sk-SK" sz="2800" dirty="0" err="1">
+                <a:solidFill>
+                  <a:srgbClr val="FF0000"/>
+                </a:solidFill>
                 <a:highlight>
                   <a:srgbClr val="FFFF00"/>
                 </a:highlight>
@@ -3792,6 +3879,9 @@
             </a:r>
             <a:r>
               <a:rPr lang="sk-SK" sz="2800" dirty="0">
+                <a:solidFill>
+                  <a:srgbClr val="FF0000"/>
+                </a:solidFill>
                 <a:highlight>
                   <a:srgbClr val="FFFF00"/>
                 </a:highlight>
@@ -3801,6 +3891,9 @@
             </a:r>
             <a:r>
               <a:rPr lang="sk-SK" sz="2800" dirty="0" err="1">
+                <a:solidFill>
+                  <a:srgbClr val="FF0000"/>
+                </a:solidFill>
                 <a:highlight>
                   <a:srgbClr val="FFFF00"/>
                 </a:highlight>
@@ -3810,6 +3903,9 @@
             </a:r>
             <a:r>
               <a:rPr lang="sk-SK" sz="2800" dirty="0">
+                <a:solidFill>
+                  <a:srgbClr val="FF0000"/>
+                </a:solidFill>
                 <a:highlight>
                   <a:srgbClr val="FFFF00"/>
                 </a:highlight>
@@ -3827,6 +3923,9 @@
             </a:pPr>
             <a:r>
               <a:rPr lang="sk-SK" sz="2800" dirty="0">
+                <a:solidFill>
+                  <a:srgbClr val="FF0000"/>
+                </a:solidFill>
                 <a:highlight>
                   <a:srgbClr val="FFFF00"/>
                 </a:highlight>
@@ -3836,6 +3935,9 @@
             </a:r>
             <a:r>
               <a:rPr lang="sk-SK" sz="2800" dirty="0" err="1">
+                <a:solidFill>
+                  <a:srgbClr val="FF0000"/>
+                </a:solidFill>
                 <a:highlight>
                   <a:srgbClr val="FFFF00"/>
                 </a:highlight>
@@ -3845,6 +3947,9 @@
             </a:r>
             <a:r>
               <a:rPr lang="sk-SK" sz="2800" dirty="0">
+                <a:solidFill>
+                  <a:srgbClr val="FF0000"/>
+                </a:solidFill>
                 <a:highlight>
                   <a:srgbClr val="FFFF00"/>
                 </a:highlight>
@@ -3854,6 +3959,9 @@
             </a:r>
             <a:r>
               <a:rPr lang="sk-SK" sz="2800" dirty="0" err="1">
+                <a:solidFill>
+                  <a:srgbClr val="FF0000"/>
+                </a:solidFill>
                 <a:highlight>
                   <a:srgbClr val="FFFF00"/>
                 </a:highlight>
@@ -3863,6 +3971,9 @@
             </a:r>
             <a:r>
               <a:rPr lang="sk-SK" sz="2800" dirty="0">
+                <a:solidFill>
+                  <a:srgbClr val="FF0000"/>
+                </a:solidFill>
                 <a:highlight>
                   <a:srgbClr val="FFFF00"/>
                 </a:highlight>
@@ -3880,6 +3991,9 @@
             </a:pPr>
             <a:r>
               <a:rPr lang="sk-SK" sz="2800" dirty="0">
+                <a:solidFill>
+                  <a:srgbClr val="FF0000"/>
+                </a:solidFill>
                 <a:highlight>
                   <a:srgbClr val="FFFF00"/>
                 </a:highlight>
@@ -3916,10 +4030,24 @@
               <a:t>Cyklus </a:t>
             </a:r>
             <a:r>
-              <a:rPr lang="sk-SK" dirty="0" err="1"/>
+              <a:rPr lang="sk-SK" dirty="0" err="1">
+                <a:solidFill>
+                  <a:srgbClr val="FF0000"/>
+                </a:solidFill>
+                <a:highlight>
+                  <a:srgbClr val="00FFFF"/>
+                </a:highlight>
+              </a:rPr>
               <a:t>for-each</a:t>
             </a:r>
-            <a:endParaRPr lang="sk-SK" dirty="0"/>
+            <a:endParaRPr lang="sk-SK" dirty="0">
+              <a:solidFill>
+                <a:srgbClr val="FF0000"/>
+              </a:solidFill>
+              <a:highlight>
+                <a:srgbClr val="00FFFF"/>
+              </a:highlight>
+            </a:endParaRPr>
           </a:p>
         </p:txBody>
       </p:sp>
@@ -4574,6 +4702,9 @@
             </a:pPr>
             <a:r>
               <a:rPr lang="sk-SK" dirty="0">
+                <a:solidFill>
+                  <a:srgbClr val="FF0000"/>
+                </a:solidFill>
                 <a:highlight>
                   <a:srgbClr val="FFFF00"/>
                 </a:highlight>
@@ -4582,7 +4713,14 @@
               <a:t>switch</a:t>
             </a:r>
             <a:r>
-              <a:rPr lang="sk-SK" dirty="0"/>
+              <a:rPr lang="sk-SK" dirty="0">
+                <a:solidFill>
+                  <a:srgbClr val="FF0000"/>
+                </a:solidFill>
+                <a:highlight>
+                  <a:srgbClr val="00FFFF"/>
+                </a:highlight>
+              </a:rPr>
               <a:t> je podmienka pre výber z viacerých možností</a:t>
             </a:r>
           </a:p>
@@ -4593,19 +4731,43 @@
               </a:spcBef>
             </a:pPr>
             <a:r>
-              <a:rPr lang="sk-SK" sz="2800" dirty="0"/>
+              <a:rPr lang="sk-SK" sz="2800" dirty="0">
+                <a:solidFill>
+                  <a:srgbClr val="FF0000"/>
+                </a:solidFill>
+                <a:highlight>
+                  <a:srgbClr val="00FFFF"/>
+                </a:highlight>
+              </a:rPr>
               <a:t>testuje </a:t>
             </a:r>
             <a:r>
-              <a:rPr lang="sk-SK" sz="2800" b="1" dirty="0"/>
+              <a:rPr lang="sk-SK" sz="2800" b="1" dirty="0">
+                <a:solidFill>
+                  <a:srgbClr val="FF0000"/>
+                </a:solidFill>
+                <a:highlight>
+                  <a:srgbClr val="00FFFF"/>
+                </a:highlight>
+              </a:rPr>
               <a:t>primitívnu hodnotu</a:t>
             </a:r>
             <a:r>
-              <a:rPr lang="sk-SK" sz="2800" dirty="0"/>
+              <a:rPr lang="sk-SK" sz="2800" dirty="0">
+                <a:solidFill>
+                  <a:srgbClr val="FF0000"/>
+                </a:solidFill>
+                <a:highlight>
+                  <a:srgbClr val="00FFFF"/>
+                </a:highlight>
+              </a:rPr>
               <a:t>, </a:t>
             </a:r>
             <a:r>
               <a:rPr lang="sk-SK" sz="2800" dirty="0" err="1">
+                <a:solidFill>
+                  <a:srgbClr val="FF0000"/>
+                </a:solidFill>
                 <a:highlight>
                   <a:srgbClr val="FFFF00"/>
                 </a:highlight>
@@ -4614,11 +4776,21 @@
               <a:t>String</a:t>
             </a:r>
             <a:r>
-              <a:rPr lang="sk-SK" sz="2800" dirty="0"/>
+              <a:rPr lang="sk-SK" sz="2800" dirty="0">
+                <a:solidFill>
+                  <a:srgbClr val="FF0000"/>
+                </a:solidFill>
+                <a:highlight>
+                  <a:srgbClr val="00FFFF"/>
+                </a:highlight>
+              </a:rPr>
               <a:t> alebo </a:t>
             </a:r>
             <a:r>
               <a:rPr lang="sk-SK" sz="2800" dirty="0" err="1">
+                <a:solidFill>
+                  <a:srgbClr val="FF0000"/>
+                </a:solidFill>
                 <a:highlight>
                   <a:srgbClr val="FFFF00"/>
                 </a:highlight>
@@ -4627,6 +4799,9 @@
               <a:t>enum</a:t>
             </a:r>
             <a:endParaRPr lang="sk-SK" sz="2800" dirty="0">
+              <a:solidFill>
+                <a:srgbClr val="FF0000"/>
+              </a:solidFill>
               <a:highlight>
                 <a:srgbClr val="FFFF00"/>
               </a:highlight>
@@ -4640,11 +4815,21 @@
               </a:spcBef>
             </a:pPr>
             <a:r>
-              <a:rPr lang="sk-SK" sz="2800" dirty="0"/>
+              <a:rPr lang="sk-SK" sz="2800" dirty="0">
+                <a:solidFill>
+                  <a:srgbClr val="FF0000"/>
+                </a:solidFill>
+                <a:highlight>
+                  <a:srgbClr val="00FFFF"/>
+                </a:highlight>
+              </a:rPr>
               <a:t>ak nič nevyhovuje, vyberie </a:t>
             </a:r>
             <a:r>
               <a:rPr lang="sk-SK" sz="2800" dirty="0">
+                <a:solidFill>
+                  <a:srgbClr val="FF0000"/>
+                </a:solidFill>
                 <a:highlight>
                   <a:srgbClr val="FFFF00"/>
                 </a:highlight>
@@ -4660,11 +4845,21 @@
               </a:spcBef>
             </a:pPr>
             <a:r>
-              <a:rPr lang="sk-SK" sz="2800" dirty="0"/>
+              <a:rPr lang="sk-SK" sz="2800" dirty="0">
+                <a:solidFill>
+                  <a:srgbClr val="FF0000"/>
+                </a:solidFill>
+                <a:highlight>
+                  <a:srgbClr val="00FFFF"/>
+                </a:highlight>
+              </a:rPr>
               <a:t>ak neuvediem </a:t>
             </a:r>
             <a:r>
               <a:rPr lang="sk-SK" sz="2800" dirty="0">
+                <a:solidFill>
+                  <a:srgbClr val="FF0000"/>
+                </a:solidFill>
                 <a:highlight>
                   <a:srgbClr val="FFFF00"/>
                 </a:highlight>
@@ -4673,15 +4868,36 @@
               <a:t>break</a:t>
             </a:r>
             <a:r>
-              <a:rPr lang="sk-SK" sz="2800" dirty="0"/>
+              <a:rPr lang="sk-SK" sz="2800" dirty="0">
+                <a:solidFill>
+                  <a:srgbClr val="FF0000"/>
+                </a:solidFill>
+                <a:highlight>
+                  <a:srgbClr val="00FFFF"/>
+                </a:highlight>
+              </a:rPr>
               <a:t>, nastáva </a:t>
             </a:r>
             <a:r>
-              <a:rPr lang="sk-SK" sz="2800" b="1" dirty="0" err="1"/>
+              <a:rPr lang="sk-SK" sz="2800" b="1" dirty="0" err="1">
+                <a:solidFill>
+                  <a:srgbClr val="FF0000"/>
+                </a:solidFill>
+                <a:highlight>
+                  <a:srgbClr val="00FFFF"/>
+                </a:highlight>
+              </a:rPr>
               <a:t>fall-through</a:t>
             </a:r>
             <a:r>
-              <a:rPr lang="sk-SK" sz="2800" dirty="0"/>
+              <a:rPr lang="sk-SK" sz="2800" dirty="0">
+                <a:solidFill>
+                  <a:srgbClr val="FF0000"/>
+                </a:solidFill>
+                <a:highlight>
+                  <a:srgbClr val="00FFFF"/>
+                </a:highlight>
+              </a:rPr>
               <a:t> a vykoná sa aj nasledujúca možnosť</a:t>
             </a:r>
           </a:p>
@@ -5791,35 +6007,87 @@
               <a:buNone/>
             </a:pPr>
             <a:r>
-              <a:rPr lang="en-US" dirty="0"/>
+              <a:rPr lang="en-US" dirty="0">
+                <a:solidFill>
+                  <a:srgbClr val="FF0000"/>
+                </a:solidFill>
+                <a:highlight>
+                  <a:srgbClr val="00FFFF"/>
+                </a:highlight>
+              </a:rPr>
               <a:t>V Jave </a:t>
             </a:r>
             <a:r>
-              <a:rPr lang="en-US" dirty="0" err="1"/>
+              <a:rPr lang="en-US" dirty="0" err="1">
+                <a:solidFill>
+                  <a:srgbClr val="FF0000"/>
+                </a:solidFill>
+                <a:highlight>
+                  <a:srgbClr val="00FFFF"/>
+                </a:highlight>
+              </a:rPr>
               <a:t>máme</a:t>
             </a:r>
             <a:r>
-              <a:rPr lang="en-US" dirty="0"/>
+              <a:rPr lang="en-US" dirty="0">
+                <a:solidFill>
+                  <a:srgbClr val="FF0000"/>
+                </a:solidFill>
+                <a:highlight>
+                  <a:srgbClr val="00FFFF"/>
+                </a:highlight>
+              </a:rPr>
               <a:t> 4 </a:t>
             </a:r>
             <a:r>
-              <a:rPr lang="en-US" dirty="0" err="1"/>
+              <a:rPr lang="en-US" dirty="0" err="1">
+                <a:solidFill>
+                  <a:srgbClr val="FF0000"/>
+                </a:solidFill>
+                <a:highlight>
+                  <a:srgbClr val="00FFFF"/>
+                </a:highlight>
+              </a:rPr>
               <a:t>typy</a:t>
             </a:r>
             <a:r>
-              <a:rPr lang="en-US" dirty="0"/>
+              <a:rPr lang="en-US" dirty="0">
+                <a:solidFill>
+                  <a:srgbClr val="FF0000"/>
+                </a:solidFill>
+                <a:highlight>
+                  <a:srgbClr val="00FFFF"/>
+                </a:highlight>
+              </a:rPr>
               <a:t> </a:t>
             </a:r>
             <a:r>
-              <a:rPr lang="en-US" dirty="0" err="1"/>
+              <a:rPr lang="en-US" dirty="0" err="1">
+                <a:solidFill>
+                  <a:srgbClr val="FF0000"/>
+                </a:solidFill>
+                <a:highlight>
+                  <a:srgbClr val="00FFFF"/>
+                </a:highlight>
+              </a:rPr>
               <a:t>cyklov</a:t>
             </a:r>
             <a:r>
-              <a:rPr lang="en-US" dirty="0"/>
+              <a:rPr lang="en-US" dirty="0">
+                <a:solidFill>
+                  <a:srgbClr val="FF0000"/>
+                </a:solidFill>
+                <a:highlight>
+                  <a:srgbClr val="00FFFF"/>
+                </a:highlight>
+              </a:rPr>
               <a:t>: </a:t>
             </a:r>
             <a:r>
               <a:rPr lang="en-US" dirty="0">
+                <a:solidFill>
+                  <a:srgbClr val="FF0000"/>
+                </a:solidFill>
                 <a:highlight>
                   <a:srgbClr val="FFFF00"/>
                 </a:highlight>
@@ -5828,11 +6096,18 @@
               <a:t>for</a:t>
             </a:r>
             <a:r>
-              <a:rPr lang="en-US" dirty="0"/>
+              <a:rPr lang="en-US" dirty="0">
+                <a:solidFill>
+                  <a:srgbClr val="FF0000"/>
+                </a:solidFill>
+              </a:rPr>
               <a:t>, </a:t>
             </a:r>
             <a:r>
               <a:rPr lang="en-US" dirty="0">
+                <a:solidFill>
+                  <a:srgbClr val="FF0000"/>
+                </a:solidFill>
                 <a:highlight>
                   <a:srgbClr val="FFFF00"/>
                 </a:highlight>
@@ -5841,11 +6116,18 @@
               <a:t>while</a:t>
             </a:r>
             <a:r>
-              <a:rPr lang="en-US" dirty="0"/>
+              <a:rPr lang="en-US" dirty="0">
+                <a:solidFill>
+                  <a:srgbClr val="FF0000"/>
+                </a:solidFill>
+              </a:rPr>
               <a:t>, </a:t>
             </a:r>
             <a:r>
               <a:rPr lang="en-US" dirty="0">
+                <a:solidFill>
+                  <a:srgbClr val="FF0000"/>
+                </a:solidFill>
                 <a:highlight>
                   <a:srgbClr val="FFFF00"/>
                 </a:highlight>
@@ -5854,11 +6136,21 @@
               <a:t>do-while</a:t>
             </a:r>
             <a:r>
-              <a:rPr lang="en-US" dirty="0"/>
+              <a:rPr lang="en-US" dirty="0">
+                <a:solidFill>
+                  <a:srgbClr val="FF0000"/>
+                </a:solidFill>
+                <a:highlight>
+                  <a:srgbClr val="00FFFF"/>
+                </a:highlight>
+              </a:rPr>
               <a:t> a </a:t>
             </a:r>
             <a:r>
               <a:rPr lang="en-US" dirty="0">
+                <a:solidFill>
+                  <a:srgbClr val="FF0000"/>
+                </a:solidFill>
                 <a:highlight>
                   <a:srgbClr val="FFFF00"/>
                 </a:highlight>
@@ -5867,6 +6159,9 @@
               <a:t>for-each</a:t>
             </a:r>
             <a:endParaRPr lang="sk-SK" dirty="0">
+              <a:solidFill>
+                <a:srgbClr val="FF0000"/>
+              </a:solidFill>
               <a:highlight>
                 <a:srgbClr val="FFFF00"/>
               </a:highlight>
@@ -5890,7 +6185,14 @@
               <a:buNone/>
             </a:pPr>
             <a:r>
-              <a:rPr lang="sk-SK" sz="2800" dirty="0"/>
+              <a:rPr lang="sk-SK" sz="2800" dirty="0">
+                <a:solidFill>
+                  <a:srgbClr val="FF0000"/>
+                </a:solidFill>
+                <a:highlight>
+                  <a:srgbClr val="00FFFF"/>
+                </a:highlight>
+              </a:rPr>
               <a:t>Riadenie toku cyklov</a:t>
             </a:r>
           </a:p>
@@ -5902,6 +6204,9 @@
             </a:pPr>
             <a:r>
               <a:rPr lang="sk-SK" sz="2800" dirty="0">
+                <a:solidFill>
+                  <a:srgbClr val="FF0000"/>
+                </a:solidFill>
                 <a:highlight>
                   <a:srgbClr val="FFFF00"/>
                 </a:highlight>
@@ -5910,7 +6215,14 @@
               <a:t>break</a:t>
             </a:r>
             <a:r>
-              <a:rPr lang="sk-SK" sz="2800" dirty="0"/>
+              <a:rPr lang="sk-SK" sz="2800" dirty="0">
+                <a:solidFill>
+                  <a:srgbClr val="FF0000"/>
+                </a:solidFill>
+                <a:highlight>
+                  <a:srgbClr val="00FFFF"/>
+                </a:highlight>
+              </a:rPr>
               <a:t> ukončí predčasne cyklus</a:t>
             </a:r>
           </a:p>
@@ -5922,6 +6234,9 @@
             </a:pPr>
             <a:r>
               <a:rPr lang="sk-SK" sz="2800" dirty="0" err="1">
+                <a:solidFill>
+                  <a:srgbClr val="FF0000"/>
+                </a:solidFill>
                 <a:highlight>
                   <a:srgbClr val="FFFF00"/>
                 </a:highlight>
@@ -5930,12 +6245,22 @@
               <a:t>continue</a:t>
             </a:r>
             <a:r>
-              <a:rPr lang="sk-SK" sz="2800" dirty="0"/>
+              <a:rPr lang="sk-SK" sz="2800" dirty="0">
+                <a:solidFill>
+                  <a:srgbClr val="FF0000"/>
+                </a:solidFill>
+                <a:highlight>
+                  <a:srgbClr val="00FFFF"/>
+                </a:highlight>
+              </a:rPr>
               <a:t>  preskočí aktuálnu iteráciu a pokračuje ďalšou</a:t>
             </a:r>
             <a:endParaRPr lang="sk-SK" sz="2800" dirty="0">
+              <a:solidFill>
+                <a:srgbClr val="FF0000"/>
+              </a:solidFill>
               <a:highlight>
-                <a:srgbClr val="FFFF00"/>
+                <a:srgbClr val="00FFFF"/>
               </a:highlight>
               <a:latin typeface="Consolas" panose="020B0609020204030204" pitchFamily="49" charset="0"/>
             </a:endParaRPr>
